--- a/13-Presentations/PPTX/SIRAJ_Presentation-Template_v1.0.pptx
+++ b/13-Presentations/PPTX/SIRAJ_Presentation-Template_v1.0.pptx
@@ -5921,7 +5921,7 @@
                 </a:solidFill>
                 <a:latin typeface="Jost Light"/>
               </a:rPr>
-              <a:t>siraj.om   ◆   info@siraj.om   ◆   +968 2400 0000   ◆   Al Khuwair, Muscat</a:t>
+              <a:t>sirajproperties.net   ◆   info@sirajproperties.net   ◆   +968 2400 0000   ◆   Al Khuwair, Muscat</a:t>
             </a:r>
           </a:p>
         </p:txBody>
